--- a/deliverables/vantara-resposta-case.pptx
+++ b/deliverables/vantara-resposta-case.pptx
@@ -4152,7 +4152,7 @@
               </a:defRPr>
             </a:pPr>
             <a:r>
-              <a:t>SQLite local: estado e histórico das decisões humanas.</a:t>
+              <a:t>SQLite local guarda o estado e histórico das decisões humanas.</a:t>
             </a:r>
           </a:p>
         </p:txBody>
@@ -4375,7 +4375,7 @@
               </a:defRPr>
             </a:pPr>
             <a:r>
-              <a:t>Para dados reais: inferência privada + identidade e acesso aprovados pela TI. Protheus: somente leitura/exportação por 90 dias. Barte: exceção com liderança.</a:t>
+              <a:t>Para dados reais são necessários inferência privada, identidade e acesso aprovados pela TI. Protheus apenas leitura e exportação por 90 dias. Barte somente com exceção aprovada.</a:t>
             </a:r>
           </a:p>
         </p:txBody>
@@ -4465,7 +4465,7 @@
               </a:defRPr>
             </a:pPr>
             <a:r>
-              <a:t>Limites de TI e Barte: Case Vantara.pdf</a:t>
+              <a:t>Limites de TI e Barte no Case Vantara.pdf</a:t>
             </a:r>
           </a:p>
         </p:txBody>
@@ -4781,7 +4781,7 @@
               </a:defRPr>
             </a:pPr>
             <a:r>
-              <a:t>Gatilho para dados reais: inferência privada e controles de identidade/acesso. Comparar a ferramenta anterior nos mesmos casos antes de prometer impacto.</a:t>
+              <a:t>Dados reais exigem inferência privada e controles de identidade e acesso. Comparar a ferramenta anterior nos mesmos casos antes de prometer impacto.</a:t>
             </a:r>
           </a:p>
         </p:txBody>
@@ -5566,7 +5566,7 @@
               </a:defRPr>
             </a:pPr>
             <a:r>
-              <a:t>CFO: “Ninguém abre.”</a:t>
+              <a:t>Segundo o CFO, “ninguém abre”.</a:t>
             </a:r>
           </a:p>
         </p:txBody>
@@ -5611,7 +5611,7 @@
               </a:defRPr>
             </a:pPr>
             <a:r>
-              <a:t>Resposta: trocar uma promessa de conciliação autônoma por uma fila de resolução assistida.</a:t>
+              <a:t>A resposta troca a promessa de conciliação autônoma por uma fila de resolução assistida.</a:t>
             </a:r>
           </a:p>
         </p:txBody>
@@ -5701,7 +5701,7 @@
               </a:defRPr>
             </a:pPr>
             <a:r>
-              <a:t>Fonte dos números e da fala: Case Vantara.pdf</a:t>
+              <a:t>Números e fala retirados do Case Vantara.pdf</a:t>
             </a:r>
           </a:p>
         </p:txBody>
@@ -6263,7 +6263,7 @@
               </a:defRPr>
             </a:pPr>
             <a:r>
-              <a:t>Vínculo documental; candidatos ficam à parte</a:t>
+              <a:t>Vínculo documental, candidatos ficam à parte</a:t>
             </a:r>
           </a:p>
         </p:txBody>
@@ -6664,7 +6664,7 @@
               </a:defRPr>
             </a:pPr>
             <a:r>
-              <a:t>Já roda na amostra sintética de julho/2026; não grava baixa, envio ou pagamento.</a:t>
+              <a:t>Já roda na amostra sintética de julho/2026. Não grava baixa, envio ou pagamento.</a:t>
             </a:r>
           </a:p>
         </p:txBody>
@@ -6915,14 +6915,14 @@
               </a:defRPr>
             </a:pPr>
             <a:r>
-              <a:t>Contagem desta amostra; não é volume do mês nem caixa certificado.</a:t>
+              <a:t>Contagem desta amostra, não é volume do mês nem caixa certificado.</a:t>
             </a:r>
           </a:p>
         </p:txBody>
       </p:sp>
       <p:pic>
         <p:nvPicPr>
-          <p:cNvPr id="5" name="Picture 4" descr="vantara-shot-overview.png"/>
+          <p:cNvPr id="5" name="Picture 4" descr="vantara-slide-overview-clean.png"/>
           <p:cNvPicPr>
             <a:picLocks noChangeAspect="1"/>
           </p:cNvPicPr>
@@ -6937,7 +6937,7 @@
         <p:spPr>
           <a:xfrm>
             <a:off x="621792" y="1965960"/>
-            <a:ext cx="10927080" cy="3333784"/>
+            <a:ext cx="10927080" cy="2999820"/>
           </a:xfrm>
           <a:prstGeom prst="rect">
             <a:avLst/>
@@ -7074,7 +7074,7 @@
               </a:defRPr>
             </a:pPr>
             <a:r>
-              <a:t>Captura da aplicação local; amostra sintética de julho/2026</a:t>
+              <a:t>Captura da aplicação local com amostra sintética de julho/2026</a:t>
             </a:r>
           </a:p>
         </p:txBody>
@@ -7235,7 +7235,7 @@
               </a:defRPr>
             </a:pPr>
             <a:r>
-              <a:t>NF 104560:</a:t>
+              <a:t>NF 104560</a:t>
             </a:r>
           </a:p>
           <a:p>
@@ -7527,14 +7527,14 @@
               </a:defRPr>
             </a:pPr>
             <a:r>
-              <a:t>PIX da linha 17: só candidato; nenhuma atribuição automática.</a:t>
+              <a:t>PIX da linha 17 é só candidato. Nenhuma atribuição automática.</a:t>
             </a:r>
           </a:p>
         </p:txBody>
       </p:sp>
       <p:pic>
         <p:nvPicPr>
-          <p:cNvPr id="10" name="Picture 9" descr="vantara-slide-invoice-crop.png"/>
+          <p:cNvPr id="10" name="Picture 9" descr="vantara-slide-invoice-clean.png"/>
           <p:cNvPicPr>
             <a:picLocks noChangeAspect="1"/>
           </p:cNvPicPr>
@@ -7548,8 +7548,8 @@
         </p:blipFill>
         <p:spPr>
           <a:xfrm>
-            <a:off x="7068312" y="1069848"/>
-            <a:ext cx="3877056" cy="5303520"/>
+            <a:off x="7068312" y="1335024"/>
+            <a:ext cx="3877056" cy="4559417"/>
           </a:xfrm>
           <a:prstGeom prst="rect">
             <a:avLst/>
@@ -7686,7 +7686,7 @@
               </a:defRPr>
             </a:pPr>
             <a:r>
-              <a:t>Protheus:8 · extrato:8 e :17</a:t>
+              <a:t>Protheus linha 8 · extrato linhas 8 e 17</a:t>
             </a:r>
           </a:p>
         </p:txBody>
@@ -8255,7 +8255,7 @@
               </a:defRPr>
             </a:pPr>
             <a:r>
-              <a:t>A NF 104560 (Protheus) coincide pelo nome; FAT-2026-0335 (Omie) pelo nome e valor.</a:t>
+              <a:t>A NF 104560 (Protheus) coincide pelo nome. FAT-2026-0335 (Omie) pelo nome e valor.</a:t>
             </a:r>
           </a:p>
         </p:txBody>
@@ -8300,14 +8300,14 @@
               </a:defRPr>
             </a:pPr>
             <a:r>
-              <a:t>Próxima ação: pedir referência ou comprovante. Se não vier prova, marcar inconclusivo.</a:t>
+              <a:t>Próxima ação é pedir referência ou comprovante. Se não vier prova, marcar inconclusivo.</a:t>
             </a:r>
           </a:p>
         </p:txBody>
       </p:sp>
       <p:pic>
         <p:nvPicPr>
-          <p:cNvPr id="8" name="Picture 7" descr="vantara-slide-pix-crop.png"/>
+          <p:cNvPr id="8" name="Picture 7" descr="vantara-slide-pix-clean.png"/>
           <p:cNvPicPr>
             <a:picLocks noChangeAspect="1"/>
           </p:cNvPicPr>
@@ -8321,8 +8321,8 @@
         </p:blipFill>
         <p:spPr>
           <a:xfrm>
-            <a:off x="5989320" y="1444752"/>
-            <a:ext cx="5422392" cy="4142232"/>
+            <a:off x="5989320" y="1947672"/>
+            <a:ext cx="5422392" cy="2682319"/>
           </a:xfrm>
           <a:prstGeom prst="rect">
             <a:avLst/>
@@ -8369,7 +8369,7 @@
               </a:defRPr>
             </a:pPr>
             <a:r>
-              <a:t>A IA pode preparar um rascunho editável; não envia mensagem.</a:t>
+              <a:t>A IA pode preparar um rascunho editável e não envia mensagem.</a:t>
             </a:r>
           </a:p>
         </p:txBody>
@@ -8459,7 +8459,7 @@
               </a:defRPr>
             </a:pPr>
             <a:r>
-              <a:t>Extrato:17 · Protheus:8 · Omie:4</a:t>
+              <a:t>Extrato linha 17 · Protheus linha 8 · Omie linha 4</a:t>
             </a:r>
           </a:p>
         </p:txBody>
@@ -9030,7 +9030,7 @@
       </p:sp>
       <p:pic>
         <p:nvPicPr>
-          <p:cNvPr id="13" name="Picture 12" descr="vantara-slide-decision-crop.png"/>
+          <p:cNvPr id="13" name="Picture 12" descr="vantara-slide-decision-clean.png"/>
           <p:cNvPicPr>
             <a:picLocks noChangeAspect="1"/>
           </p:cNvPicPr>
@@ -9044,8 +9044,8 @@
         </p:blipFill>
         <p:spPr>
           <a:xfrm>
-            <a:off x="6922008" y="1508760"/>
-            <a:ext cx="4187952" cy="4507992"/>
+            <a:off x="6922008" y="1847088"/>
+            <a:ext cx="4187952" cy="3460444"/>
           </a:xfrm>
           <a:prstGeom prst="rect">
             <a:avLst/>
@@ -9916,7 +9916,7 @@
               </a:defRPr>
             </a:pPr>
             <a:r>
-              <a:t>Diferença demonstrada: regra auditável → interpretação contextual → decisão humana registrada.</a:t>
+              <a:t>Diferença demonstrada  ·  regra auditável → interpretação contextual → decisão humana registrada.</a:t>
             </a:r>
           </a:p>
         </p:txBody>
@@ -10006,7 +10006,7 @@
               </a:defRPr>
             </a:pPr>
             <a:r>
-              <a:t>Ferramenta anterior não usada: fala do CFO no case</a:t>
+              <a:t>Ferramenta anterior não usada segundo o CFO no case</a:t>
             </a:r>
           </a:p>
         </p:txBody>
